--- a/presentaciones/Taller_Practico_2.pptx
+++ b/presentaciones/Taller_Practico_2.pptx
@@ -7546,7 +7546,7 @@
                 <a:ea typeface="Arial" pitchFamily="34" charset="-122"/>
                 <a:cs typeface="Arial" pitchFamily="34" charset="-120"/>
               </a:rPr>
-              <a:t>Función de Python que el agente puede invocar</a:t>
+              <a:t>Función de Python: un dict o una API real</a:t>
             </a:r>
             <a:endParaRPr lang="en-US" sz="1100" dirty="0"/>
           </a:p>
@@ -7613,7 +7613,7 @@
                 <a:ea typeface="Arial" pitchFamily="34" charset="-122"/>
                 <a:cs typeface="Arial" pitchFamily="34" charset="-120"/>
               </a:rPr>
-              <a:t>hora_actual, buscar_libro</a:t>
+              <a:t>buscar_libro → Open Library</a:t>
             </a:r>
             <a:endParaRPr lang="en-US" sz="1100" dirty="0"/>
           </a:p>
@@ -13085,7 +13085,7 @@
                 <a:ea typeface="Arial" pitchFamily="34" charset="-122"/>
                 <a:cs typeface="Arial" pitchFamily="34" charset="-120"/>
               </a:rPr>
-              <a:t>Consulta si un título está disponible en el catálogo.</a:t>
+              <a:t>API REAL — Open Library, 40 millones de libros.</a:t>
             </a:r>
             <a:endParaRPr lang="en-US" sz="1000" dirty="0"/>
           </a:p>
@@ -13289,7 +13289,7 @@
                 <a:ea typeface="Arial" pitchFamily="34" charset="-122"/>
                 <a:cs typeface="Arial" pitchFamily="34" charset="-120"/>
               </a:rPr>
-              <a:t>Dice qué salas de estudio quedan libres a una hora.</a:t>
+              <a:t>SIMULADA — DUOC no tiene API pública de salas.</a:t>
             </a:r>
             <a:endParaRPr lang="en-US" sz="1000" dirty="0"/>
           </a:p>
@@ -13493,36 +13493,7 @@
                 <a:ea typeface="Arial" pitchFamily="34" charset="-122"/>
                 <a:cs typeface="Arial" pitchFamily="34" charset="-120"/>
               </a:rPr>
-              <a:t>Reserva una sala de verdad.</a:t>
-            </a:r>
-            <a:endParaRPr lang="en-US" sz="1000" dirty="0"/>
-          </a:p>
-          <a:p>
-            <a:pPr indent="0" marL="0">
-              <a:lnSpc>
-                <a:spcPct val="125000"/>
-              </a:lnSpc>
-              <a:buNone/>
-            </a:pPr>
-            <a:endParaRPr lang="en-US" sz="1000" dirty="0"/>
-          </a:p>
-          <a:p>
-            <a:pPr indent="0" marL="0">
-              <a:lnSpc>
-                <a:spcPct val="125000"/>
-              </a:lnSpc>
-              <a:buNone/>
-            </a:pPr>
-            <a:r>
-              <a:rPr lang="en-US" sz="1000" dirty="0">
-                <a:solidFill>
-                  <a:srgbClr val="6E6E73"/>
-                </a:solidFill>
-                <a:latin typeface="Arial" pitchFamily="34" charset="0"/>
-                <a:ea typeface="Arial" pitchFamily="34" charset="-122"/>
-                <a:cs typeface="Arial" pitchFamily="34" charset="-120"/>
-              </a:rPr>
-              <a:t>Cambia el estado del mundo. Volvemos sobre esto en el módulo 3.</a:t>
+              <a:t>SIMULADA, y menos mal: cambia el estado del mundo. Volvemos en el módulo 3.</a:t>
             </a:r>
             <a:endParaRPr lang="en-US" sz="1000" dirty="0"/>
           </a:p>
@@ -13586,7 +13557,7 @@
                 <a:ea typeface="Arial" pitchFamily="34" charset="-122"/>
                 <a:cs typeface="Arial" pitchFamily="34" charset="-120"/>
               </a:rPr>
-              <a:t>Los datos son un diccionario de Python:  </a:t>
+              <a:t>Una herramienta es una función de Python:  </a:t>
             </a:r>
             <a:pPr indent="0" marL="0">
               <a:lnSpc>
@@ -13603,7 +13574,7 @@
                 <a:ea typeface="Arial" pitchFamily="34" charset="-122"/>
                 <a:cs typeface="Arial" pitchFamily="34" charset="-120"/>
               </a:rPr>
-              <a:t>al agente solo le llega lo que la función devuelve.</a:t>
+              <a:t>puede leer un diccionario o llamar a una API real. Al agente le da igual: solo ve lo que devuelve.</a:t>
             </a:r>
             <a:endParaRPr lang="en-US" sz="1150" dirty="0"/>
           </a:p>
@@ -14557,7 +14528,7 @@
                 <a:ea typeface="Courier New" pitchFamily="34" charset="-122"/>
                 <a:cs typeface="Courier New" pitchFamily="34" charset="-120"/>
               </a:rPr>
-              <a:t>  'Sapiens' de Harari esta DISPONIBLE en el estante H-12.</a:t>
+              <a:t>  Encontre 2320 resultados: Sapiens de Yuval Noah Harari, 2011</a:t>
             </a:r>
             <a:endParaRPr lang="en-US" sz="1150" dirty="0"/>
           </a:p>

--- a/presentaciones/Taller_Practico_2.pptx
+++ b/presentaciones/Taller_Practico_2.pptx
@@ -1223,7 +1223,7 @@
           <a:p>
             <a:r>
               <a:rPr lang="en-US" dirty="0"/>
-              <a:t>Di en voz alta: dominio libre, hay plantilla, y hay que entregarlo EJECUTADO. Define y anuncia la fecha de entrega.</a:t>
+              <a:t>Di en voz alta: dominio libre, hay plantilla (03_Tarea_Plantilla), y hay que entregarlo EJECUTADO. Fecha de entrega: lunes 14 de septiembre de 2026, 23:00. Ya está puesta en el campus.</a:t>
             </a:r>
             <a:endParaRPr lang="en-US" dirty="0"/>
           </a:p>
@@ -8652,7 +8652,7 @@
                 <a:ea typeface="Arial" pitchFamily="34" charset="-122"/>
                 <a:cs typeface="Arial" pitchFamily="34" charset="-120"/>
               </a:rPr>
-              <a:t>Dominio libre · 100 puntos, el 100% de la nota del curso</a:t>
+              <a:t>Dominio libre · 100 puntos = 100% de la nota · Entrega: lunes 14 de septiembre, 23:00</a:t>
             </a:r>
             <a:endParaRPr lang="en-US" sz="1400" dirty="0"/>
           </a:p>
@@ -11852,7 +11852,7 @@
                 <a:ea typeface="Arial" pitchFamily="34" charset="-122"/>
                 <a:cs typeface="Arial" pitchFamily="34" charset="-120"/>
               </a:rPr>
-              <a:t>Por qué olvida y cómo hacer que recuerde  ·  15 min</a:t>
+              <a:t>Por qué olvida y cómo hacer que recuerde  ·  13 min</a:t>
             </a:r>
             <a:endParaRPr lang="en-US" sz="1000" dirty="0"/>
           </a:p>
@@ -12027,7 +12027,7 @@
                 <a:ea typeface="Arial" pitchFamily="34" charset="-122"/>
                 <a:cs typeface="Arial" pitchFamily="34" charset="-120"/>
               </a:rPr>
-              <a:t>Los tres tipos, y cuál es el que de verdad protege  ·  15 min</a:t>
+              <a:t>Los tres tipos, y cuál es el que de verdad protege  ·  10 min</a:t>
             </a:r>
             <a:endParaRPr lang="en-US" sz="1000" dirty="0"/>
           </a:p>
@@ -12202,7 +12202,7 @@
                 <a:ea typeface="Arial" pitchFamily="34" charset="-122"/>
                 <a:cs typeface="Arial" pitchFamily="34" charset="-120"/>
               </a:rPr>
-              <a:t>Una cuarta herramienta y el encargo evaluado  ·  10 min</a:t>
+              <a:t>Una cuarta herramienta y el encargo evaluado  ·  12 min</a:t>
             </a:r>
             <a:endParaRPr lang="en-US" sz="1000" dirty="0"/>
           </a:p>

--- a/presentaciones/Taller_Practico_2.pptx
+++ b/presentaciones/Taller_Practico_2.pptx
@@ -1839,7 +1839,7 @@
           <a:p>
             <a:r>
               <a:rPr lang="en-US" dirty="0"/>
-              <a:t>Detén la clase aquí y señala los DOS Invoking. Es el concepto central de la sesión. Si a alguien le salió distinto, úsalo para hablar de alucinación.</a:t>
+              <a:t>Detén la clase aquí y señala los DOS Invoking. Es el concepto central de la sesión. Si a alguien le salió distinto, úsalo para hablar de alucinación. OJO: el número de resultados cambia cada día porque es una consulta real a Open Library. Si en pantalla sale otro, dilo en voz alta: es la prueba de que no está simulado.</a:t>
             </a:r>
             <a:endParaRPr lang="en-US" dirty="0"/>
           </a:p>
@@ -14528,7 +14528,7 @@
                 <a:ea typeface="Courier New" pitchFamily="34" charset="-122"/>
                 <a:cs typeface="Courier New" pitchFamily="34" charset="-120"/>
               </a:rPr>
-              <a:t>  Encontre 2320 resultados: Sapiens de Yuval Noah Harari, 2011</a:t>
+              <a:t>  Encontre 2318 resultados: Sapiens de Yuval Noah Harari, 2011</a:t>
             </a:r>
             <a:endParaRPr lang="en-US" sz="1150" dirty="0"/>
           </a:p>
